--- a/翻译研究方法/第1组/问卷调查法正反例_学院模板版.pptx
+++ b/翻译研究方法/第1组/问卷调查法正反例_学院模板版.pptx
@@ -11970,8 +11970,8 @@
         </p:nvSpPr>
         <p:spPr>
           <a:xfrm>
-            <a:off x="7772400" y="2761488"/>
-            <a:ext cx="3840480" cy="256032"/>
+            <a:off x="7772400" y="2688336"/>
+            <a:ext cx="3840480" cy="201168"/>
           </a:xfrm>
           <a:prstGeom prst="rect">
             <a:avLst/>
@@ -11986,7 +11986,7 @@
           <a:p>
             <a:pPr algn="l">
               <a:lnSpc>
-                <a:spcPct val="132000"/>
+                <a:spcPct val="130000"/>
               </a:lnSpc>
               <a:spcBef>
                 <a:spcPts val="0"/>
@@ -11996,7 +11996,7 @@
               </a:spcAft>
             </a:pPr>
             <a:r>
-              <a:rPr sz="1019" b="0" i="0">
+              <a:rPr sz="980" b="0" i="0">
                 <a:solidFill>
                   <a:srgbClr val="1F2438"/>
                 </a:solidFill>
@@ -12017,8 +12017,8 @@
         </p:nvSpPr>
         <p:spPr>
           <a:xfrm>
-            <a:off x="7772400" y="2990088"/>
-            <a:ext cx="3840480" cy="274320"/>
+            <a:off x="7772400" y="2880360"/>
+            <a:ext cx="3840480" cy="237744"/>
           </a:xfrm>
           <a:prstGeom prst="rect">
             <a:avLst/>
@@ -12033,7 +12033,7 @@
           <a:p>
             <a:pPr algn="l">
               <a:lnSpc>
-                <a:spcPct val="125000"/>
+                <a:spcPct val="120000"/>
               </a:lnSpc>
               <a:spcBef>
                 <a:spcPts val="0"/>
@@ -12043,7 +12043,7 @@
               </a:spcAft>
             </a:pPr>
             <a:r>
-              <a:rPr sz="860" b="0" i="0">
+              <a:rPr sz="819" b="0" i="0">
                 <a:solidFill>
                   <a:srgbClr val="A5ACBA"/>
                 </a:solidFill>
@@ -12064,8 +12064,8 @@
         </p:nvSpPr>
         <p:spPr>
           <a:xfrm>
-            <a:off x="7772400" y="3364992"/>
-            <a:ext cx="3840480" cy="256032"/>
+            <a:off x="7772400" y="3145536"/>
+            <a:ext cx="3840480" cy="201168"/>
           </a:xfrm>
           <a:prstGeom prst="rect">
             <a:avLst/>
@@ -12080,7 +12080,7 @@
           <a:p>
             <a:pPr algn="l">
               <a:lnSpc>
-                <a:spcPct val="132000"/>
+                <a:spcPct val="130000"/>
               </a:lnSpc>
               <a:spcBef>
                 <a:spcPts val="0"/>
@@ -12090,7 +12090,7 @@
               </a:spcAft>
             </a:pPr>
             <a:r>
-              <a:rPr sz="1019" b="0" i="0">
+              <a:rPr sz="980" b="0" i="0">
                 <a:solidFill>
                   <a:srgbClr val="1F2438"/>
                 </a:solidFill>
@@ -12111,8 +12111,8 @@
         </p:nvSpPr>
         <p:spPr>
           <a:xfrm>
-            <a:off x="7772400" y="3593592"/>
-            <a:ext cx="3840480" cy="274320"/>
+            <a:off x="7772400" y="3337560"/>
+            <a:ext cx="3840480" cy="237744"/>
           </a:xfrm>
           <a:prstGeom prst="rect">
             <a:avLst/>
@@ -12127,7 +12127,7 @@
           <a:p>
             <a:pPr algn="l">
               <a:lnSpc>
-                <a:spcPct val="125000"/>
+                <a:spcPct val="120000"/>
               </a:lnSpc>
               <a:spcBef>
                 <a:spcPts val="0"/>
@@ -12137,7 +12137,7 @@
               </a:spcAft>
             </a:pPr>
             <a:r>
-              <a:rPr sz="860" b="0" i="0">
+              <a:rPr sz="819" b="0" i="0">
                 <a:solidFill>
                   <a:srgbClr val="A5ACBA"/>
                 </a:solidFill>
@@ -12158,8 +12158,8 @@
         </p:nvSpPr>
         <p:spPr>
           <a:xfrm>
-            <a:off x="7772400" y="3968496"/>
-            <a:ext cx="3840480" cy="256032"/>
+            <a:off x="7772400" y="3602736"/>
+            <a:ext cx="3840480" cy="201168"/>
           </a:xfrm>
           <a:prstGeom prst="rect">
             <a:avLst/>
@@ -12174,7 +12174,7 @@
           <a:p>
             <a:pPr algn="l">
               <a:lnSpc>
-                <a:spcPct val="132000"/>
+                <a:spcPct val="130000"/>
               </a:lnSpc>
               <a:spcBef>
                 <a:spcPts val="0"/>
@@ -12184,7 +12184,7 @@
               </a:spcAft>
             </a:pPr>
             <a:r>
-              <a:rPr sz="1019" b="0" i="0">
+              <a:rPr sz="980" b="0" i="0">
                 <a:solidFill>
                   <a:srgbClr val="1F2438"/>
                 </a:solidFill>
@@ -12205,8 +12205,8 @@
         </p:nvSpPr>
         <p:spPr>
           <a:xfrm>
-            <a:off x="7772400" y="4197096"/>
-            <a:ext cx="3840480" cy="274320"/>
+            <a:off x="7772400" y="3794760"/>
+            <a:ext cx="3840480" cy="237744"/>
           </a:xfrm>
           <a:prstGeom prst="rect">
             <a:avLst/>
@@ -12221,7 +12221,7 @@
           <a:p>
             <a:pPr algn="l">
               <a:lnSpc>
-                <a:spcPct val="125000"/>
+                <a:spcPct val="120000"/>
               </a:lnSpc>
               <a:spcBef>
                 <a:spcPts val="0"/>
@@ -12231,7 +12231,7 @@
               </a:spcAft>
             </a:pPr>
             <a:r>
-              <a:rPr sz="860" b="0" i="0">
+              <a:rPr sz="819" b="0" i="0">
                 <a:solidFill>
                   <a:srgbClr val="A5ACBA"/>
                 </a:solidFill>
@@ -12252,8 +12252,8 @@
         </p:nvSpPr>
         <p:spPr>
           <a:xfrm>
-            <a:off x="7772400" y="4572000"/>
-            <a:ext cx="3840480" cy="256032"/>
+            <a:off x="7772400" y="4059935"/>
+            <a:ext cx="3840480" cy="201168"/>
           </a:xfrm>
           <a:prstGeom prst="rect">
             <a:avLst/>
@@ -12268,7 +12268,7 @@
           <a:p>
             <a:pPr algn="l">
               <a:lnSpc>
-                <a:spcPct val="132000"/>
+                <a:spcPct val="130000"/>
               </a:lnSpc>
               <a:spcBef>
                 <a:spcPts val="0"/>
@@ -12278,7 +12278,7 @@
               </a:spcAft>
             </a:pPr>
             <a:r>
-              <a:rPr sz="1019" b="0" i="0">
+              <a:rPr sz="980" b="0" i="0">
                 <a:solidFill>
                   <a:srgbClr val="1F2438"/>
                 </a:solidFill>
@@ -12299,8 +12299,8 @@
         </p:nvSpPr>
         <p:spPr>
           <a:xfrm>
-            <a:off x="7772400" y="4800600"/>
-            <a:ext cx="3840480" cy="274320"/>
+            <a:off x="7772400" y="4251959"/>
+            <a:ext cx="3840480" cy="237744"/>
           </a:xfrm>
           <a:prstGeom prst="rect">
             <a:avLst/>
@@ -12315,7 +12315,7 @@
           <a:p>
             <a:pPr algn="l">
               <a:lnSpc>
-                <a:spcPct val="125000"/>
+                <a:spcPct val="120000"/>
               </a:lnSpc>
               <a:spcBef>
                 <a:spcPts val="0"/>
@@ -12325,7 +12325,7 @@
               </a:spcAft>
             </a:pPr>
             <a:r>
-              <a:rPr sz="860" b="0" i="0">
+              <a:rPr sz="819" b="0" i="0">
                 <a:solidFill>
                   <a:srgbClr val="A5ACBA"/>
                 </a:solidFill>
@@ -12346,8 +12346,8 @@
         </p:nvSpPr>
         <p:spPr>
           <a:xfrm>
-            <a:off x="7772400" y="5175504"/>
-            <a:ext cx="3840480" cy="256032"/>
+            <a:off x="7772400" y="4517136"/>
+            <a:ext cx="3840480" cy="201168"/>
           </a:xfrm>
           <a:prstGeom prst="rect">
             <a:avLst/>
@@ -12362,7 +12362,7 @@
           <a:p>
             <a:pPr algn="l">
               <a:lnSpc>
-                <a:spcPct val="132000"/>
+                <a:spcPct val="130000"/>
               </a:lnSpc>
               <a:spcBef>
                 <a:spcPts val="0"/>
@@ -12372,7 +12372,7 @@
               </a:spcAft>
             </a:pPr>
             <a:r>
-              <a:rPr sz="1019" b="0" i="0">
+              <a:rPr sz="980" b="0" i="0">
                 <a:solidFill>
                   <a:srgbClr val="1F2438"/>
                 </a:solidFill>
@@ -12393,8 +12393,8 @@
         </p:nvSpPr>
         <p:spPr>
           <a:xfrm>
-            <a:off x="7772400" y="5404104"/>
-            <a:ext cx="3840480" cy="274320"/>
+            <a:off x="7772400" y="4709159"/>
+            <a:ext cx="3840480" cy="237744"/>
           </a:xfrm>
           <a:prstGeom prst="rect">
             <a:avLst/>
@@ -12409,7 +12409,7 @@
           <a:p>
             <a:pPr algn="l">
               <a:lnSpc>
-                <a:spcPct val="125000"/>
+                <a:spcPct val="120000"/>
               </a:lnSpc>
               <a:spcBef>
                 <a:spcPts val="0"/>
@@ -12419,7 +12419,7 @@
               </a:spcAft>
             </a:pPr>
             <a:r>
-              <a:rPr sz="860" b="0" i="0">
+              <a:rPr sz="819" b="0" i="0">
                 <a:solidFill>
                   <a:srgbClr val="A5ACBA"/>
                 </a:solidFill>
@@ -12440,8 +12440,8 @@
         </p:nvSpPr>
         <p:spPr>
           <a:xfrm>
-            <a:off x="7772400" y="5779008"/>
-            <a:ext cx="3840480" cy="256032"/>
+            <a:off x="7772400" y="4974336"/>
+            <a:ext cx="3840480" cy="201168"/>
           </a:xfrm>
           <a:prstGeom prst="rect">
             <a:avLst/>
@@ -12456,7 +12456,7 @@
           <a:p>
             <a:pPr algn="l">
               <a:lnSpc>
-                <a:spcPct val="132000"/>
+                <a:spcPct val="130000"/>
               </a:lnSpc>
               <a:spcBef>
                 <a:spcPts val="0"/>
@@ -12466,7 +12466,7 @@
               </a:spcAft>
             </a:pPr>
             <a:r>
-              <a:rPr sz="1019" b="0" i="0">
+              <a:rPr sz="980" b="0" i="0">
                 <a:solidFill>
                   <a:srgbClr val="1F2438"/>
                 </a:solidFill>
@@ -12487,8 +12487,8 @@
         </p:nvSpPr>
         <p:spPr>
           <a:xfrm>
-            <a:off x="7772400" y="6007608"/>
-            <a:ext cx="3840480" cy="274320"/>
+            <a:off x="7772400" y="5166359"/>
+            <a:ext cx="3840480" cy="237744"/>
           </a:xfrm>
           <a:prstGeom prst="rect">
             <a:avLst/>
@@ -12503,7 +12503,7 @@
           <a:p>
             <a:pPr algn="l">
               <a:lnSpc>
-                <a:spcPct val="125000"/>
+                <a:spcPct val="120000"/>
               </a:lnSpc>
               <a:spcBef>
                 <a:spcPts val="0"/>
@@ -12513,7 +12513,7 @@
               </a:spcAft>
             </a:pPr>
             <a:r>
-              <a:rPr sz="860" b="0" i="0">
+              <a:rPr sz="819" b="0" i="0">
                 <a:solidFill>
                   <a:srgbClr val="A5ACBA"/>
                 </a:solidFill>
@@ -12534,7 +12534,7 @@
         </p:nvSpPr>
         <p:spPr>
           <a:xfrm>
-            <a:off x="7772400" y="6437376"/>
+            <a:off x="7772400" y="5449823"/>
             <a:ext cx="3840480" cy="365760"/>
           </a:xfrm>
           <a:prstGeom prst="rect">
@@ -12560,7 +12560,7 @@
               </a:spcAft>
             </a:pPr>
             <a:r>
-              <a:rPr sz="950" b="0" i="0">
+              <a:rPr sz="900" b="0" i="0">
                 <a:solidFill>
                   <a:srgbClr val="A5ACBA"/>
                 </a:solidFill>
@@ -16424,8 +16424,8 @@
         </p:nvSpPr>
         <p:spPr>
           <a:xfrm>
-            <a:off x="658368" y="2487168"/>
-            <a:ext cx="10881360" cy="1115568"/>
+            <a:off x="658368" y="2432304"/>
+            <a:ext cx="10881360" cy="987552"/>
           </a:xfrm>
           <a:prstGeom prst="rect">
             <a:avLst/>
@@ -16468,8 +16468,8 @@
         </p:nvSpPr>
         <p:spPr>
           <a:xfrm>
-            <a:off x="658368" y="2487168"/>
-            <a:ext cx="50292" cy="1115568"/>
+            <a:off x="658368" y="2432304"/>
+            <a:ext cx="50292" cy="987552"/>
           </a:xfrm>
           <a:prstGeom prst="rect">
             <a:avLst/>
@@ -16512,8 +16512,8 @@
         </p:nvSpPr>
         <p:spPr>
           <a:xfrm>
-            <a:off x="987552" y="2688336"/>
-            <a:ext cx="10241280" cy="868680"/>
+            <a:off x="987552" y="2560320"/>
+            <a:ext cx="10241280" cy="786384"/>
           </a:xfrm>
           <a:prstGeom prst="rect">
             <a:avLst/>
@@ -16528,7 +16528,7 @@
           <a:p>
             <a:pPr algn="l">
               <a:lnSpc>
-                <a:spcPct val="134000"/>
+                <a:spcPct val="130000"/>
               </a:lnSpc>
               <a:spcBef>
                 <a:spcPts val="0"/>
@@ -16538,7 +16538,7 @@
               </a:spcAft>
             </a:pPr>
             <a:r>
-              <a:rPr sz="1500" b="1" i="0" spc="30">
+              <a:rPr sz="1500" b="1" i="0" spc="20">
                 <a:solidFill>
                   <a:srgbClr val="1F2438"/>
                 </a:solidFill>
@@ -16547,30 +16547,6 @@
                 <a:cs typeface="思源黑体 CN Light"/>
               </a:rPr>
               <a:t>1. 构念先于题项</a:t>
-            </a:r>
-          </a:p>
-          <a:p>
-            <a:pPr algn="l">
-              <a:lnSpc>
-                <a:spcPct val="150000"/>
-              </a:lnSpc>
-              <a:spcBef>
-                <a:spcPts val="0"/>
-              </a:spcBef>
-              <a:spcAft>
-                <a:spcPts val="0"/>
-              </a:spcAft>
-            </a:pPr>
-            <a:r>
-              <a:rPr sz="1180" b="0" i="0">
-                <a:solidFill>
-                  <a:srgbClr val="4A5266"/>
-                </a:solidFill>
-                <a:latin typeface="思源黑体 CN Light"/>
-                <a:ea typeface="思源黑体 CN Light"/>
-                <a:cs typeface="思源黑体 CN Light"/>
-              </a:rPr>
-              <a:t>先有操作定义与对齐表，再写题项。</a:t>
             </a:r>
           </a:p>
           <a:p>
@@ -16586,7 +16562,31 @@
               </a:spcAft>
             </a:pPr>
             <a:r>
-              <a:rPr sz="1000" b="0" i="0">
+              <a:rPr sz="1150" b="0" i="0">
+                <a:solidFill>
+                  <a:srgbClr val="4A5266"/>
+                </a:solidFill>
+                <a:latin typeface="思源黑体 CN Light"/>
+                <a:ea typeface="思源黑体 CN Light"/>
+                <a:cs typeface="思源黑体 CN Light"/>
+              </a:rPr>
+              <a:t>先有操作定义与对齐表，再写题项。</a:t>
+            </a:r>
+          </a:p>
+          <a:p>
+            <a:pPr algn="l">
+              <a:lnSpc>
+                <a:spcPct val="135000"/>
+              </a:lnSpc>
+              <a:spcBef>
+                <a:spcPts val="0"/>
+              </a:spcBef>
+              <a:spcAft>
+                <a:spcPts val="0"/>
+              </a:spcAft>
+            </a:pPr>
+            <a:r>
+              <a:rPr sz="950" b="0" i="0">
                 <a:solidFill>
                   <a:srgbClr val="A5ACBA"/>
                 </a:solidFill>
@@ -16607,8 +16607,8 @@
         </p:nvSpPr>
         <p:spPr>
           <a:xfrm>
-            <a:off x="658368" y="3749039"/>
-            <a:ext cx="10881360" cy="1115568"/>
+            <a:off x="658368" y="3547872"/>
+            <a:ext cx="10881360" cy="987552"/>
           </a:xfrm>
           <a:prstGeom prst="rect">
             <a:avLst/>
@@ -16651,8 +16651,8 @@
         </p:nvSpPr>
         <p:spPr>
           <a:xfrm>
-            <a:off x="658368" y="3749039"/>
-            <a:ext cx="50292" cy="1115568"/>
+            <a:off x="658368" y="3547872"/>
+            <a:ext cx="50292" cy="987552"/>
           </a:xfrm>
           <a:prstGeom prst="rect">
             <a:avLst/>
@@ -16695,8 +16695,8 @@
         </p:nvSpPr>
         <p:spPr>
           <a:xfrm>
-            <a:off x="987552" y="3950207"/>
-            <a:ext cx="10241280" cy="868680"/>
+            <a:off x="987552" y="3675887"/>
+            <a:ext cx="10241280" cy="786384"/>
           </a:xfrm>
           <a:prstGeom prst="rect">
             <a:avLst/>
@@ -16711,7 +16711,7 @@
           <a:p>
             <a:pPr algn="l">
               <a:lnSpc>
-                <a:spcPct val="134000"/>
+                <a:spcPct val="130000"/>
               </a:lnSpc>
               <a:spcBef>
                 <a:spcPts val="0"/>
@@ -16721,7 +16721,7 @@
               </a:spcAft>
             </a:pPr>
             <a:r>
-              <a:rPr sz="1500" b="1" i="0" spc="30">
+              <a:rPr sz="1500" b="1" i="0" spc="20">
                 <a:solidFill>
                   <a:srgbClr val="1F2438"/>
                 </a:solidFill>
@@ -16730,30 +16730,6 @@
                 <a:cs typeface="思源黑体 CN Light"/>
               </a:rPr>
               <a:t>2. 删题是设计，不是失败</a:t>
-            </a:r>
-          </a:p>
-          <a:p>
-            <a:pPr algn="l">
-              <a:lnSpc>
-                <a:spcPct val="150000"/>
-              </a:lnSpc>
-              <a:spcBef>
-                <a:spcPts val="0"/>
-              </a:spcBef>
-              <a:spcAft>
-                <a:spcPts val="0"/>
-              </a:spcAft>
-            </a:pPr>
-            <a:r>
-              <a:rPr sz="1180" b="0" i="0">
-                <a:solidFill>
-                  <a:srgbClr val="4A5266"/>
-                </a:solidFill>
-                <a:latin typeface="思源黑体 CN Light"/>
-                <a:ea typeface="思源黑体 CN Light"/>
-                <a:cs typeface="思源黑体 CN Light"/>
-              </a:rPr>
-              <a:t>74 → 28 → 21，每轮都留下依据。</a:t>
             </a:r>
           </a:p>
           <a:p>
@@ -16769,7 +16745,31 @@
               </a:spcAft>
             </a:pPr>
             <a:r>
-              <a:rPr sz="1000" b="0" i="0">
+              <a:rPr sz="1150" b="0" i="0">
+                <a:solidFill>
+                  <a:srgbClr val="4A5266"/>
+                </a:solidFill>
+                <a:latin typeface="思源黑体 CN Light"/>
+                <a:ea typeface="思源黑体 CN Light"/>
+                <a:cs typeface="思源黑体 CN Light"/>
+              </a:rPr>
+              <a:t>74 → 28 → 21，每轮都留下依据。</a:t>
+            </a:r>
+          </a:p>
+          <a:p>
+            <a:pPr algn="l">
+              <a:lnSpc>
+                <a:spcPct val="135000"/>
+              </a:lnSpc>
+              <a:spcBef>
+                <a:spcPts val="0"/>
+              </a:spcBef>
+              <a:spcAft>
+                <a:spcPts val="0"/>
+              </a:spcAft>
+            </a:pPr>
+            <a:r>
+              <a:rPr sz="950" b="0" i="0">
                 <a:solidFill>
                   <a:srgbClr val="A5ACBA"/>
                 </a:solidFill>
@@ -16790,8 +16790,8 @@
         </p:nvSpPr>
         <p:spPr>
           <a:xfrm>
-            <a:off x="658368" y="5010912"/>
-            <a:ext cx="10881360" cy="1115568"/>
+            <a:off x="658368" y="4663440"/>
+            <a:ext cx="10881360" cy="987552"/>
           </a:xfrm>
           <a:prstGeom prst="rect">
             <a:avLst/>
@@ -16834,8 +16834,8 @@
         </p:nvSpPr>
         <p:spPr>
           <a:xfrm>
-            <a:off x="658368" y="5010912"/>
-            <a:ext cx="50292" cy="1115568"/>
+            <a:off x="658368" y="4663440"/>
+            <a:ext cx="50292" cy="987552"/>
           </a:xfrm>
           <a:prstGeom prst="rect">
             <a:avLst/>
@@ -16878,8 +16878,8 @@
         </p:nvSpPr>
         <p:spPr>
           <a:xfrm>
-            <a:off x="987552" y="5212079"/>
-            <a:ext cx="10241280" cy="868680"/>
+            <a:off x="987552" y="4791455"/>
+            <a:ext cx="10241280" cy="786384"/>
           </a:xfrm>
           <a:prstGeom prst="rect">
             <a:avLst/>
@@ -16894,7 +16894,7 @@
           <a:p>
             <a:pPr algn="l">
               <a:lnSpc>
-                <a:spcPct val="134000"/>
+                <a:spcPct val="130000"/>
               </a:lnSpc>
               <a:spcBef>
                 <a:spcPts val="0"/>
@@ -16904,7 +16904,7 @@
               </a:spcAft>
             </a:pPr>
             <a:r>
-              <a:rPr sz="1500" b="1" i="0" spc="30">
+              <a:rPr sz="1500" b="1" i="0" spc="20">
                 <a:solidFill>
                   <a:srgbClr val="1F2438"/>
                 </a:solidFill>
@@ -16913,30 +16913,6 @@
                 <a:cs typeface="思源黑体 CN Light"/>
               </a:rPr>
               <a:t>3. 结论只走一步</a:t>
-            </a:r>
-          </a:p>
-          <a:p>
-            <a:pPr algn="l">
-              <a:lnSpc>
-                <a:spcPct val="150000"/>
-              </a:lnSpc>
-              <a:spcBef>
-                <a:spcPts val="0"/>
-              </a:spcBef>
-              <a:spcAft>
-                <a:spcPts val="0"/>
-              </a:spcAft>
-            </a:pPr>
-            <a:r>
-              <a:rPr sz="1180" b="0" i="0">
-                <a:solidFill>
-                  <a:srgbClr val="4A5266"/>
-                </a:solidFill>
-                <a:latin typeface="思源黑体 CN Light"/>
-                <a:ea typeface="思源黑体 CN Light"/>
-                <a:cs typeface="思源黑体 CN Light"/>
-              </a:rPr>
-              <a:t>只说“可测、能区分阶段”，不说“笔记好所以口译好”。</a:t>
             </a:r>
           </a:p>
           <a:p>
@@ -16952,7 +16928,31 @@
               </a:spcAft>
             </a:pPr>
             <a:r>
-              <a:rPr sz="1000" b="0" i="0">
+              <a:rPr sz="1150" b="0" i="0">
+                <a:solidFill>
+                  <a:srgbClr val="4A5266"/>
+                </a:solidFill>
+                <a:latin typeface="思源黑体 CN Light"/>
+                <a:ea typeface="思源黑体 CN Light"/>
+                <a:cs typeface="思源黑体 CN Light"/>
+              </a:rPr>
+              <a:t>只说“可测、能区分阶段”，不说“笔记好所以口译好”。</a:t>
+            </a:r>
+          </a:p>
+          <a:p>
+            <a:pPr algn="l">
+              <a:lnSpc>
+                <a:spcPct val="135000"/>
+              </a:lnSpc>
+              <a:spcBef>
+                <a:spcPts val="0"/>
+              </a:spcBef>
+              <a:spcAft>
+                <a:spcPts val="0"/>
+              </a:spcAft>
+            </a:pPr>
+            <a:r>
+              <a:rPr sz="950" b="0" i="0">
                 <a:solidFill>
                   <a:srgbClr val="A5ACBA"/>
                 </a:solidFill>
@@ -16973,7 +16973,7 @@
         </p:nvSpPr>
         <p:spPr>
           <a:xfrm>
-            <a:off x="658368" y="6327647"/>
+            <a:off x="658368" y="5852159"/>
             <a:ext cx="10881360" cy="237744"/>
           </a:xfrm>
           <a:prstGeom prst="rect">
@@ -19506,8 +19506,8 @@
         </p:nvSpPr>
         <p:spPr>
           <a:xfrm>
-            <a:off x="658368" y="2487168"/>
-            <a:ext cx="10881360" cy="1115568"/>
+            <a:off x="658368" y="2432304"/>
+            <a:ext cx="10881360" cy="987552"/>
           </a:xfrm>
           <a:prstGeom prst="rect">
             <a:avLst/>
@@ -19550,8 +19550,8 @@
         </p:nvSpPr>
         <p:spPr>
           <a:xfrm>
-            <a:off x="658368" y="2487168"/>
-            <a:ext cx="50292" cy="1115568"/>
+            <a:off x="658368" y="2432304"/>
+            <a:ext cx="50292" cy="987552"/>
           </a:xfrm>
           <a:prstGeom prst="rect">
             <a:avLst/>
@@ -19594,8 +19594,8 @@
         </p:nvSpPr>
         <p:spPr>
           <a:xfrm>
-            <a:off x="987552" y="2688336"/>
-            <a:ext cx="10241280" cy="868680"/>
+            <a:off x="987552" y="2560320"/>
+            <a:ext cx="10241280" cy="786384"/>
           </a:xfrm>
           <a:prstGeom prst="rect">
             <a:avLst/>
@@ -19610,7 +19610,7 @@
           <a:p>
             <a:pPr algn="l">
               <a:lnSpc>
-                <a:spcPct val="134000"/>
+                <a:spcPct val="130000"/>
               </a:lnSpc>
               <a:spcBef>
                 <a:spcPts val="0"/>
@@ -19620,7 +19620,7 @@
               </a:spcAft>
             </a:pPr>
             <a:r>
-              <a:rPr sz="1500" b="1" i="0" spc="30">
+              <a:rPr sz="1500" b="1" i="0" spc="20">
                 <a:solidFill>
                   <a:srgbClr val="1F2438"/>
                 </a:solidFill>
@@ -19634,7 +19634,7 @@
           <a:p>
             <a:pPr algn="l">
               <a:lnSpc>
-                <a:spcPct val="150000"/>
+                <a:spcPct val="140000"/>
               </a:lnSpc>
               <a:spcBef>
                 <a:spcPts val="0"/>
@@ -19644,7 +19644,7 @@
               </a:spcAft>
             </a:pPr>
             <a:r>
-              <a:rPr sz="1180" b="0" i="0">
+              <a:rPr sz="1150" b="0" i="0">
                 <a:solidFill>
                   <a:srgbClr val="4A5266"/>
                 </a:solidFill>
@@ -19658,7 +19658,7 @@
           <a:p>
             <a:pPr algn="l">
               <a:lnSpc>
-                <a:spcPct val="150000"/>
+                <a:spcPct val="140000"/>
               </a:lnSpc>
               <a:spcBef>
                 <a:spcPts val="0"/>
@@ -19668,7 +19668,7 @@
               </a:spcAft>
             </a:pPr>
             <a:r>
-              <a:rPr sz="1180" b="0" i="0">
+              <a:rPr sz="1150" b="0" i="0">
                 <a:solidFill>
                   <a:srgbClr val="1F2438"/>
                 </a:solidFill>
@@ -19689,8 +19689,8 @@
         </p:nvSpPr>
         <p:spPr>
           <a:xfrm>
-            <a:off x="658368" y="3749039"/>
-            <a:ext cx="10881360" cy="1115568"/>
+            <a:off x="658368" y="3547872"/>
+            <a:ext cx="10881360" cy="987552"/>
           </a:xfrm>
           <a:prstGeom prst="rect">
             <a:avLst/>
@@ -19733,8 +19733,8 @@
         </p:nvSpPr>
         <p:spPr>
           <a:xfrm>
-            <a:off x="658368" y="3749039"/>
-            <a:ext cx="50292" cy="1115568"/>
+            <a:off x="658368" y="3547872"/>
+            <a:ext cx="50292" cy="987552"/>
           </a:xfrm>
           <a:prstGeom prst="rect">
             <a:avLst/>
@@ -19777,8 +19777,8 @@
         </p:nvSpPr>
         <p:spPr>
           <a:xfrm>
-            <a:off x="987552" y="3950207"/>
-            <a:ext cx="10241280" cy="868680"/>
+            <a:off x="987552" y="3675887"/>
+            <a:ext cx="10241280" cy="786384"/>
           </a:xfrm>
           <a:prstGeom prst="rect">
             <a:avLst/>
@@ -19793,7 +19793,7 @@
           <a:p>
             <a:pPr algn="l">
               <a:lnSpc>
-                <a:spcPct val="134000"/>
+                <a:spcPct val="130000"/>
               </a:lnSpc>
               <a:spcBef>
                 <a:spcPts val="0"/>
@@ -19803,7 +19803,7 @@
               </a:spcAft>
             </a:pPr>
             <a:r>
-              <a:rPr sz="1500" b="1" i="0" spc="30">
+              <a:rPr sz="1500" b="1" i="0" spc="20">
                 <a:solidFill>
                   <a:srgbClr val="1F2438"/>
                 </a:solidFill>
@@ -19817,7 +19817,7 @@
           <a:p>
             <a:pPr algn="l">
               <a:lnSpc>
-                <a:spcPct val="150000"/>
+                <a:spcPct val="140000"/>
               </a:lnSpc>
               <a:spcBef>
                 <a:spcPts val="0"/>
@@ -19827,7 +19827,7 @@
               </a:spcAft>
             </a:pPr>
             <a:r>
-              <a:rPr sz="1180" b="0" i="0">
+              <a:rPr sz="1150" b="0" i="0">
                 <a:solidFill>
                   <a:srgbClr val="4A5266"/>
                 </a:solidFill>
@@ -19841,7 +19841,7 @@
           <a:p>
             <a:pPr algn="l">
               <a:lnSpc>
-                <a:spcPct val="150000"/>
+                <a:spcPct val="140000"/>
               </a:lnSpc>
               <a:spcBef>
                 <a:spcPts val="0"/>
@@ -19851,7 +19851,7 @@
               </a:spcAft>
             </a:pPr>
             <a:r>
-              <a:rPr sz="1180" b="0" i="0">
+              <a:rPr sz="1150" b="0" i="0">
                 <a:solidFill>
                   <a:srgbClr val="1F2438"/>
                 </a:solidFill>
@@ -19872,8 +19872,8 @@
         </p:nvSpPr>
         <p:spPr>
           <a:xfrm>
-            <a:off x="658368" y="5010912"/>
-            <a:ext cx="10881360" cy="1115568"/>
+            <a:off x="658368" y="4663440"/>
+            <a:ext cx="10881360" cy="987552"/>
           </a:xfrm>
           <a:prstGeom prst="rect">
             <a:avLst/>
@@ -19916,8 +19916,8 @@
         </p:nvSpPr>
         <p:spPr>
           <a:xfrm>
-            <a:off x="658368" y="5010912"/>
-            <a:ext cx="50292" cy="1115568"/>
+            <a:off x="658368" y="4663440"/>
+            <a:ext cx="50292" cy="987552"/>
           </a:xfrm>
           <a:prstGeom prst="rect">
             <a:avLst/>
@@ -19960,8 +19960,8 @@
         </p:nvSpPr>
         <p:spPr>
           <a:xfrm>
-            <a:off x="987552" y="5212079"/>
-            <a:ext cx="10241280" cy="868680"/>
+            <a:off x="987552" y="4791455"/>
+            <a:ext cx="10241280" cy="786384"/>
           </a:xfrm>
           <a:prstGeom prst="rect">
             <a:avLst/>
@@ -19976,7 +19976,7 @@
           <a:p>
             <a:pPr algn="l">
               <a:lnSpc>
-                <a:spcPct val="134000"/>
+                <a:spcPct val="130000"/>
               </a:lnSpc>
               <a:spcBef>
                 <a:spcPts val="0"/>
@@ -19986,7 +19986,7 @@
               </a:spcAft>
             </a:pPr>
             <a:r>
-              <a:rPr sz="1500" b="1" i="0" spc="30">
+              <a:rPr sz="1500" b="1" i="0" spc="20">
                 <a:solidFill>
                   <a:srgbClr val="1F2438"/>
                 </a:solidFill>
@@ -20000,7 +20000,7 @@
           <a:p>
             <a:pPr algn="l">
               <a:lnSpc>
-                <a:spcPct val="150000"/>
+                <a:spcPct val="140000"/>
               </a:lnSpc>
               <a:spcBef>
                 <a:spcPts val="0"/>
@@ -20010,7 +20010,7 @@
               </a:spcAft>
             </a:pPr>
             <a:r>
-              <a:rPr sz="1180" b="0" i="0">
+              <a:rPr sz="1150" b="0" i="0">
                 <a:solidFill>
                   <a:srgbClr val="4A5266"/>
                 </a:solidFill>
@@ -20024,7 +20024,7 @@
           <a:p>
             <a:pPr algn="l">
               <a:lnSpc>
-                <a:spcPct val="150000"/>
+                <a:spcPct val="140000"/>
               </a:lnSpc>
               <a:spcBef>
                 <a:spcPts val="0"/>
@@ -20034,7 +20034,7 @@
               </a:spcAft>
             </a:pPr>
             <a:r>
-              <a:rPr sz="1180" b="0" i="0">
+              <a:rPr sz="1150" b="0" i="0">
                 <a:solidFill>
                   <a:srgbClr val="1F2438"/>
                 </a:solidFill>
@@ -20055,7 +20055,7 @@
         </p:nvSpPr>
         <p:spPr>
           <a:xfrm>
-            <a:off x="658368" y="6327647"/>
+            <a:off x="658368" y="5852159"/>
             <a:ext cx="10881360" cy="237744"/>
           </a:xfrm>
           <a:prstGeom prst="rect">
